--- a/lectures/uom-se1/10.1.pptx
+++ b/lectures/uom-se1/10.1.pptx
@@ -1049,7 +1049,7 @@
           <a:p>
             <a:fld id="{7A77D19F-C277-F54A-B043-DC484A0EC657}" type="datetimeFigureOut">
               <a:rPr lang="en-US" smtClean="0"/>
-              <a:t>12/2/25</a:t>
+              <a:t>12/3/25</a:t>
             </a:fld>
             <a:endParaRPr lang="en-US"/>
           </a:p>
@@ -1550,7 +1550,7 @@
           <a:p>
             <a:fld id="{89BA84C3-F59E-364D-9E70-DFF28C6F1C8C}" type="datetimeFigureOut">
               <a:rPr lang="en-US" smtClean="0"/>
-              <a:t>12/2/25</a:t>
+              <a:t>12/3/25</a:t>
             </a:fld>
             <a:endParaRPr lang="en-US"/>
           </a:p>
@@ -1748,7 +1748,7 @@
           <a:p>
             <a:fld id="{89BA84C3-F59E-364D-9E70-DFF28C6F1C8C}" type="datetimeFigureOut">
               <a:rPr lang="en-US" smtClean="0"/>
-              <a:t>12/2/25</a:t>
+              <a:t>12/3/25</a:t>
             </a:fld>
             <a:endParaRPr lang="en-US"/>
           </a:p>
@@ -1956,7 +1956,7 @@
           <a:p>
             <a:fld id="{89BA84C3-F59E-364D-9E70-DFF28C6F1C8C}" type="datetimeFigureOut">
               <a:rPr lang="en-US" smtClean="0"/>
-              <a:t>12/2/25</a:t>
+              <a:t>12/3/25</a:t>
             </a:fld>
             <a:endParaRPr lang="en-US"/>
           </a:p>
@@ -2456,7 +2456,7 @@
           <a:p>
             <a:fld id="{89BA84C3-F59E-364D-9E70-DFF28C6F1C8C}" type="datetimeFigureOut">
               <a:rPr lang="en-US" smtClean="0"/>
-              <a:t>12/2/25</a:t>
+              <a:t>12/3/25</a:t>
             </a:fld>
             <a:endParaRPr lang="en-US"/>
           </a:p>
@@ -2731,7 +2731,7 @@
           <a:p>
             <a:fld id="{89BA84C3-F59E-364D-9E70-DFF28C6F1C8C}" type="datetimeFigureOut">
               <a:rPr lang="en-US" smtClean="0"/>
-              <a:t>12/2/25</a:t>
+              <a:t>12/3/25</a:t>
             </a:fld>
             <a:endParaRPr lang="en-US"/>
           </a:p>
@@ -2996,7 +2996,7 @@
           <a:p>
             <a:fld id="{89BA84C3-F59E-364D-9E70-DFF28C6F1C8C}" type="datetimeFigureOut">
               <a:rPr lang="en-US" smtClean="0"/>
-              <a:t>12/2/25</a:t>
+              <a:t>12/3/25</a:t>
             </a:fld>
             <a:endParaRPr lang="en-US"/>
           </a:p>
@@ -3408,7 +3408,7 @@
           <a:p>
             <a:fld id="{89BA84C3-F59E-364D-9E70-DFF28C6F1C8C}" type="datetimeFigureOut">
               <a:rPr lang="en-US" smtClean="0"/>
-              <a:t>12/2/25</a:t>
+              <a:t>12/3/25</a:t>
             </a:fld>
             <a:endParaRPr lang="en-US"/>
           </a:p>
@@ -3549,7 +3549,7 @@
           <a:p>
             <a:fld id="{89BA84C3-F59E-364D-9E70-DFF28C6F1C8C}" type="datetimeFigureOut">
               <a:rPr lang="en-US" smtClean="0"/>
-              <a:t>12/2/25</a:t>
+              <a:t>12/3/25</a:t>
             </a:fld>
             <a:endParaRPr lang="en-US"/>
           </a:p>
@@ -3662,7 +3662,7 @@
           <a:p>
             <a:fld id="{89BA84C3-F59E-364D-9E70-DFF28C6F1C8C}" type="datetimeFigureOut">
               <a:rPr lang="en-US" smtClean="0"/>
-              <a:t>12/2/25</a:t>
+              <a:t>12/3/25</a:t>
             </a:fld>
             <a:endParaRPr lang="en-US"/>
           </a:p>
@@ -3973,7 +3973,7 @@
           <a:p>
             <a:fld id="{89BA84C3-F59E-364D-9E70-DFF28C6F1C8C}" type="datetimeFigureOut">
               <a:rPr lang="en-US" smtClean="0"/>
-              <a:t>12/2/25</a:t>
+              <a:t>12/3/25</a:t>
             </a:fld>
             <a:endParaRPr lang="en-US"/>
           </a:p>
@@ -4261,7 +4261,7 @@
           <a:p>
             <a:fld id="{89BA84C3-F59E-364D-9E70-DFF28C6F1C8C}" type="datetimeFigureOut">
               <a:rPr lang="en-US" smtClean="0"/>
-              <a:t>12/2/25</a:t>
+              <a:t>12/3/25</a:t>
             </a:fld>
             <a:endParaRPr lang="en-US"/>
           </a:p>
@@ -4502,7 +4502,7 @@
           <a:p>
             <a:fld id="{89BA84C3-F59E-364D-9E70-DFF28C6F1C8C}" type="datetimeFigureOut">
               <a:rPr lang="en-US" smtClean="0"/>
-              <a:t>12/2/25</a:t>
+              <a:t>12/3/25</a:t>
             </a:fld>
             <a:endParaRPr lang="en-US"/>
           </a:p>
@@ -5160,7 +5160,7 @@
         </p:blipFill>
         <p:spPr>
           <a:xfrm>
-            <a:off x="4343400" y="3498943"/>
+            <a:off x="4533898" y="3498943"/>
             <a:ext cx="3124200" cy="3124200"/>
           </a:xfrm>
           <a:prstGeom prst="rect">
@@ -7201,14 +7201,14 @@
             </a:ln>
             <a:extLst>
               <a:ext uri="{909E8E84-426E-40dd-AFC4-6F175D3DCCD1}">
-                <a14:hiddenFill xmlns:a14="http://schemas.microsoft.com/office/drawing/2010/main" xmlns="">
+                <a14:hiddenFill xmlns="" xmlns:a14="http://schemas.microsoft.com/office/drawing/2010/main">
                   <a:solidFill>
                     <a:srgbClr val="FFFFFF"/>
                   </a:solidFill>
                 </a14:hiddenFill>
               </a:ext>
               <a:ext uri="{91240B29-F687-4f45-9708-019B960494DF}">
-                <a14:hiddenLine xmlns:a14="http://schemas.microsoft.com/office/drawing/2010/main" xmlns="" w="9525">
+                <a14:hiddenLine xmlns="" xmlns:a14="http://schemas.microsoft.com/office/drawing/2010/main" w="9525">
                   <a:solidFill>
                     <a:srgbClr val="000000"/>
                   </a:solidFill>
@@ -7364,14 +7364,14 @@
             </a:ln>
             <a:extLst>
               <a:ext uri="{909E8E84-426E-40dd-AFC4-6F175D3DCCD1}">
-                <a14:hiddenFill xmlns:a14="http://schemas.microsoft.com/office/drawing/2010/main" xmlns="">
+                <a14:hiddenFill xmlns="" xmlns:a14="http://schemas.microsoft.com/office/drawing/2010/main">
                   <a:solidFill>
                     <a:srgbClr val="FFFFFF"/>
                   </a:solidFill>
                 </a14:hiddenFill>
               </a:ext>
               <a:ext uri="{91240B29-F687-4f45-9708-019B960494DF}">
-                <a14:hiddenLine xmlns:a14="http://schemas.microsoft.com/office/drawing/2010/main" xmlns="" w="9525">
+                <a14:hiddenLine xmlns="" xmlns:a14="http://schemas.microsoft.com/office/drawing/2010/main" w="9525">
                   <a:solidFill>
                     <a:srgbClr val="000000"/>
                   </a:solidFill>
@@ -8287,14 +8287,14 @@
             </a:ln>
             <a:extLst>
               <a:ext uri="{909E8E84-426E-40dd-AFC4-6F175D3DCCD1}">
-                <a14:hiddenFill xmlns:a14="http://schemas.microsoft.com/office/drawing/2010/main" xmlns="">
+                <a14:hiddenFill xmlns="" xmlns:a14="http://schemas.microsoft.com/office/drawing/2010/main">
                   <a:solidFill>
                     <a:srgbClr val="FFFFFF"/>
                   </a:solidFill>
                 </a14:hiddenFill>
               </a:ext>
               <a:ext uri="{91240B29-F687-4f45-9708-019B960494DF}">
-                <a14:hiddenLine xmlns:a14="http://schemas.microsoft.com/office/drawing/2010/main" xmlns="" w="9525">
+                <a14:hiddenLine xmlns="" xmlns:a14="http://schemas.microsoft.com/office/drawing/2010/main" w="9525">
                   <a:solidFill>
                     <a:srgbClr val="000000"/>
                   </a:solidFill>
@@ -8456,14 +8456,14 @@
             </a:ln>
             <a:extLst>
               <a:ext uri="{909E8E84-426E-40dd-AFC4-6F175D3DCCD1}">
-                <a14:hiddenFill xmlns:a14="http://schemas.microsoft.com/office/drawing/2010/main" xmlns="">
+                <a14:hiddenFill xmlns="" xmlns:a14="http://schemas.microsoft.com/office/drawing/2010/main">
                   <a:solidFill>
                     <a:srgbClr val="FFFFFF"/>
                   </a:solidFill>
                 </a14:hiddenFill>
               </a:ext>
               <a:ext uri="{91240B29-F687-4f45-9708-019B960494DF}">
-                <a14:hiddenLine xmlns:a14="http://schemas.microsoft.com/office/drawing/2010/main" xmlns="" w="9525">
+                <a14:hiddenLine xmlns="" xmlns:a14="http://schemas.microsoft.com/office/drawing/2010/main" w="9525">
                   <a:solidFill>
                     <a:srgbClr val="000000"/>
                   </a:solidFill>
@@ -9652,14 +9652,14 @@
             </a:ln>
             <a:extLst>
               <a:ext uri="{909E8E84-426E-40dd-AFC4-6F175D3DCCD1}">
-                <a14:hiddenFill xmlns:a14="http://schemas.microsoft.com/office/drawing/2010/main" xmlns="">
+                <a14:hiddenFill xmlns="" xmlns:a14="http://schemas.microsoft.com/office/drawing/2010/main">
                   <a:solidFill>
                     <a:srgbClr val="FFFFFF"/>
                   </a:solidFill>
                 </a14:hiddenFill>
               </a:ext>
               <a:ext uri="{91240B29-F687-4f45-9708-019B960494DF}">
-                <a14:hiddenLine xmlns:a14="http://schemas.microsoft.com/office/drawing/2010/main" xmlns="" w="9525">
+                <a14:hiddenLine xmlns="" xmlns:a14="http://schemas.microsoft.com/office/drawing/2010/main" w="9525">
                   <a:solidFill>
                     <a:srgbClr val="000000"/>
                   </a:solidFill>
@@ -9821,14 +9821,14 @@
             </a:ln>
             <a:extLst>
               <a:ext uri="{909E8E84-426E-40dd-AFC4-6F175D3DCCD1}">
-                <a14:hiddenFill xmlns:a14="http://schemas.microsoft.com/office/drawing/2010/main" xmlns="">
+                <a14:hiddenFill xmlns="" xmlns:a14="http://schemas.microsoft.com/office/drawing/2010/main">
                   <a:solidFill>
                     <a:srgbClr val="FFFFFF"/>
                   </a:solidFill>
                 </a14:hiddenFill>
               </a:ext>
               <a:ext uri="{91240B29-F687-4f45-9708-019B960494DF}">
-                <a14:hiddenLine xmlns:a14="http://schemas.microsoft.com/office/drawing/2010/main" xmlns="" w="9525">
+                <a14:hiddenLine xmlns="" xmlns:a14="http://schemas.microsoft.com/office/drawing/2010/main" w="9525">
                   <a:solidFill>
                     <a:srgbClr val="000000"/>
                   </a:solidFill>
@@ -13879,14 +13879,14 @@
           </a:ln>
           <a:extLst>
             <a:ext uri="{909E8E84-426E-40dd-AFC4-6F175D3DCCD1}">
-              <a14:hiddenFill xmlns="" xmlns:a14="http://schemas.microsoft.com/office/drawing/2010/main">
+              <a14:hiddenFill xmlns:a14="http://schemas.microsoft.com/office/drawing/2010/main" xmlns="">
                 <a:solidFill>
                   <a:srgbClr val="FFFFFF"/>
                 </a:solidFill>
               </a14:hiddenFill>
             </a:ext>
             <a:ext uri="{91240B29-F687-4f45-9708-019B960494DF}">
-              <a14:hiddenLine xmlns="" xmlns:a14="http://schemas.microsoft.com/office/drawing/2010/main" w="9525">
+              <a14:hiddenLine xmlns:a14="http://schemas.microsoft.com/office/drawing/2010/main" xmlns="" w="9525">
                 <a:solidFill>
                   <a:srgbClr val="000000"/>
                 </a:solidFill>
@@ -13896,7 +13896,7 @@
               </a14:hiddenLine>
             </a:ext>
             <a:ext uri="{FAA26D3D-D897-4be2-8F04-BA451C77F1D7}">
-              <ma14:placeholderFlag xmlns="" xmlns:ma14="http://schemas.microsoft.com/office/mac/drawingml/2011/main" val="1"/>
+              <ma14:placeholderFlag xmlns:ma14="http://schemas.microsoft.com/office/mac/drawingml/2011/main" xmlns="" val="1"/>
             </a:ext>
           </a:extLst>
         </p:spPr>
@@ -15089,14 +15089,14 @@
           </a:ln>
           <a:extLst>
             <a:ext uri="{909E8E84-426E-40dd-AFC4-6F175D3DCCD1}">
-              <a14:hiddenFill xmlns:a14="http://schemas.microsoft.com/office/drawing/2010/main" xmlns="">
+              <a14:hiddenFill xmlns="" xmlns:a14="http://schemas.microsoft.com/office/drawing/2010/main">
                 <a:solidFill>
                   <a:srgbClr val="FFFFFF"/>
                 </a:solidFill>
               </a14:hiddenFill>
             </a:ext>
             <a:ext uri="{91240B29-F687-4f45-9708-019B960494DF}">
-              <a14:hiddenLine xmlns:a14="http://schemas.microsoft.com/office/drawing/2010/main" xmlns="" w="9525">
+              <a14:hiddenLine xmlns="" xmlns:a14="http://schemas.microsoft.com/office/drawing/2010/main" w="9525">
                 <a:solidFill>
                   <a:srgbClr val="000000"/>
                 </a:solidFill>
@@ -15106,7 +15106,7 @@
               </a14:hiddenLine>
             </a:ext>
             <a:ext uri="{FAA26D3D-D897-4be2-8F04-BA451C77F1D7}">
-              <ma14:placeholderFlag xmlns:ma14="http://schemas.microsoft.com/office/mac/drawingml/2011/main" xmlns="" val="1"/>
+              <ma14:placeholderFlag xmlns="" xmlns:ma14="http://schemas.microsoft.com/office/mac/drawingml/2011/main" val="1"/>
             </a:ext>
           </a:extLst>
         </p:spPr>
@@ -15710,14 +15710,14 @@
           </a:ln>
           <a:extLst>
             <a:ext uri="{909E8E84-426E-40dd-AFC4-6F175D3DCCD1}">
-              <a14:hiddenFill xmlns:a14="http://schemas.microsoft.com/office/drawing/2010/main" xmlns="">
+              <a14:hiddenFill xmlns="" xmlns:a14="http://schemas.microsoft.com/office/drawing/2010/main">
                 <a:solidFill>
                   <a:srgbClr val="FFFFFF"/>
                 </a:solidFill>
               </a14:hiddenFill>
             </a:ext>
             <a:ext uri="{91240B29-F687-4f45-9708-019B960494DF}">
-              <a14:hiddenLine xmlns:a14="http://schemas.microsoft.com/office/drawing/2010/main" xmlns="" w="9525">
+              <a14:hiddenLine xmlns="" xmlns:a14="http://schemas.microsoft.com/office/drawing/2010/main" w="9525">
                 <a:solidFill>
                   <a:srgbClr val="000000"/>
                 </a:solidFill>
@@ -15727,7 +15727,7 @@
               </a14:hiddenLine>
             </a:ext>
             <a:ext uri="{FAA26D3D-D897-4be2-8F04-BA451C77F1D7}">
-              <ma14:placeholderFlag xmlns:ma14="http://schemas.microsoft.com/office/mac/drawingml/2011/main" xmlns="" val="1"/>
+              <ma14:placeholderFlag xmlns="" xmlns:ma14="http://schemas.microsoft.com/office/mac/drawingml/2011/main" val="1"/>
             </a:ext>
           </a:extLst>
         </p:spPr>
@@ -17480,14 +17480,14 @@
           </a:ln>
           <a:extLst>
             <a:ext uri="{909E8E84-426E-40dd-AFC4-6F175D3DCCD1}">
-              <a14:hiddenFill xmlns:a14="http://schemas.microsoft.com/office/drawing/2010/main" xmlns="">
+              <a14:hiddenFill xmlns="" xmlns:a14="http://schemas.microsoft.com/office/drawing/2010/main">
                 <a:solidFill>
                   <a:srgbClr val="FFFFFF"/>
                 </a:solidFill>
               </a14:hiddenFill>
             </a:ext>
             <a:ext uri="{91240B29-F687-4f45-9708-019B960494DF}">
-              <a14:hiddenLine xmlns:a14="http://schemas.microsoft.com/office/drawing/2010/main" xmlns="" w="9525">
+              <a14:hiddenLine xmlns="" xmlns:a14="http://schemas.microsoft.com/office/drawing/2010/main" w="9525">
                 <a:solidFill>
                   <a:srgbClr val="000000"/>
                 </a:solidFill>
@@ -17497,7 +17497,7 @@
               </a14:hiddenLine>
             </a:ext>
             <a:ext uri="{FAA26D3D-D897-4be2-8F04-BA451C77F1D7}">
-              <ma14:placeholderFlag xmlns:ma14="http://schemas.microsoft.com/office/mac/drawingml/2011/main" xmlns="" val="1"/>
+              <ma14:placeholderFlag xmlns="" xmlns:ma14="http://schemas.microsoft.com/office/mac/drawingml/2011/main" val="1"/>
             </a:ext>
           </a:extLst>
         </p:spPr>
@@ -18435,14 +18435,14 @@
           </a:ln>
           <a:extLst>
             <a:ext uri="{909E8E84-426E-40dd-AFC4-6F175D3DCCD1}">
-              <a14:hiddenFill xmlns:a14="http://schemas.microsoft.com/office/drawing/2010/main" xmlns="">
+              <a14:hiddenFill xmlns="" xmlns:a14="http://schemas.microsoft.com/office/drawing/2010/main">
                 <a:solidFill>
                   <a:srgbClr val="FFFFFF"/>
                 </a:solidFill>
               </a14:hiddenFill>
             </a:ext>
             <a:ext uri="{91240B29-F687-4f45-9708-019B960494DF}">
-              <a14:hiddenLine xmlns:a14="http://schemas.microsoft.com/office/drawing/2010/main" xmlns="" w="9525">
+              <a14:hiddenLine xmlns="" xmlns:a14="http://schemas.microsoft.com/office/drawing/2010/main" w="9525">
                 <a:solidFill>
                   <a:srgbClr val="000000"/>
                 </a:solidFill>
@@ -18452,7 +18452,7 @@
               </a14:hiddenLine>
             </a:ext>
             <a:ext uri="{FAA26D3D-D897-4be2-8F04-BA451C77F1D7}">
-              <ma14:placeholderFlag xmlns:ma14="http://schemas.microsoft.com/office/mac/drawingml/2011/main" xmlns="" val="1"/>
+              <ma14:placeholderFlag xmlns="" xmlns:ma14="http://schemas.microsoft.com/office/mac/drawingml/2011/main" val="1"/>
             </a:ext>
           </a:extLst>
         </p:spPr>
